--- a/Collection Layout for ALS Disease Project.pptx
+++ b/Collection Layout for ALS Disease Project.pptx
@@ -6,10 +6,12 @@
   </p:sldMasterIdLst>
   <p:sldIdLst>
     <p:sldId id="257" r:id="rId2"/>
-    <p:sldId id="259" r:id="rId3"/>
-    <p:sldId id="260" r:id="rId4"/>
-    <p:sldId id="258" r:id="rId5"/>
-    <p:sldId id="261" r:id="rId6"/>
+    <p:sldId id="263" r:id="rId3"/>
+    <p:sldId id="259" r:id="rId4"/>
+    <p:sldId id="260" r:id="rId5"/>
+    <p:sldId id="258" r:id="rId6"/>
+    <p:sldId id="262" r:id="rId7"/>
+    <p:sldId id="261" r:id="rId8"/>
   </p:sldIdLst>
   <p:sldSz cx="12192000" cy="6858000"/>
   <p:notesSz cx="6858000" cy="9144000"/>
@@ -3382,13 +3384,13 @@
         </p:nvPicPr>
         <p:blipFill rotWithShape="1">
           <a:blip r:embed="rId2"/>
-          <a:srcRect l="76261" t="15493"/>
+          <a:srcRect l="76261" t="36259" b="17323"/>
           <a:stretch/>
         </p:blipFill>
         <p:spPr>
           <a:xfrm>
-            <a:off x="9540668" y="1915011"/>
-            <a:ext cx="2000167" cy="3227541"/>
+            <a:off x="9857424" y="2761861"/>
+            <a:ext cx="2000167" cy="1772818"/>
           </a:xfrm>
         </p:spPr>
       </p:pic>
@@ -3420,7 +3422,7 @@
         </p:blipFill>
         <p:spPr>
           <a:xfrm>
-            <a:off x="368656" y="2188755"/>
+            <a:off x="368656" y="1946307"/>
             <a:ext cx="1868518" cy="1393766"/>
           </a:xfrm>
           <a:prstGeom prst="rect">
@@ -3456,7 +3458,7 @@
         </p:blipFill>
         <p:spPr>
           <a:xfrm>
-            <a:off x="2441360" y="2188755"/>
+            <a:off x="2334575" y="1946307"/>
             <a:ext cx="1868519" cy="1406937"/>
           </a:xfrm>
           <a:prstGeom prst="rect">
@@ -3492,7 +3494,7 @@
         </p:blipFill>
         <p:spPr>
           <a:xfrm>
-            <a:off x="1389104" y="3649003"/>
+            <a:off x="379638" y="3429000"/>
             <a:ext cx="1857536" cy="1406547"/>
           </a:xfrm>
           <a:prstGeom prst="rect">
@@ -3500,50 +3502,21 @@
           </a:prstGeom>
         </p:spPr>
       </p:pic>
-      <p:pic>
-        <p:nvPicPr>
-          <p:cNvPr id="13" name="Content Placeholder 4">
-            <a:extLst>
-              <a:ext uri="{FF2B5EF4-FFF2-40B4-BE49-F238E27FC236}">
-                <a16:creationId xmlns:a16="http://schemas.microsoft.com/office/drawing/2014/main" id="{483CAB0D-0EDF-D182-21C0-C4A0DFE1E8EF}"/>
-              </a:ext>
-            </a:extLst>
-          </p:cNvPr>
-          <p:cNvPicPr>
-            <a:picLocks noChangeAspect="1"/>
-          </p:cNvPicPr>
+      <p:sp>
+        <p:nvSpPr>
+          <p:cNvPr id="14" name="Arrow: Right 13">
+            <a:extLst>
+              <a:ext uri="{FF2B5EF4-FFF2-40B4-BE49-F238E27FC236}">
+                <a16:creationId xmlns:a16="http://schemas.microsoft.com/office/drawing/2014/main" id="{132480B2-51ED-C0AA-C3A7-DDF5AAC5DA78}"/>
+              </a:ext>
+            </a:extLst>
+          </p:cNvPr>
+          <p:cNvSpPr/>
           <p:nvPr/>
-        </p:nvPicPr>
-        <p:blipFill rotWithShape="1">
-          <a:blip r:embed="rId2"/>
-          <a:srcRect l="46964" t="36899" r="37505" b="15682"/>
-          <a:stretch/>
-        </p:blipFill>
+        </p:nvSpPr>
         <p:spPr>
           <a:xfrm>
-            <a:off x="5398857" y="2265983"/>
-            <a:ext cx="2078489" cy="2876569"/>
-          </a:xfrm>
-          <a:prstGeom prst="rect">
-            <a:avLst/>
-          </a:prstGeom>
-        </p:spPr>
-      </p:pic>
-      <p:sp>
-        <p:nvSpPr>
-          <p:cNvPr id="14" name="Arrow: Right 13">
-            <a:extLst>
-              <a:ext uri="{FF2B5EF4-FFF2-40B4-BE49-F238E27FC236}">
-                <a16:creationId xmlns:a16="http://schemas.microsoft.com/office/drawing/2014/main" id="{132480B2-51ED-C0AA-C3A7-DDF5AAC5DA78}"/>
-              </a:ext>
-            </a:extLst>
-          </p:cNvPr>
-          <p:cNvSpPr/>
-          <p:nvPr/>
-        </p:nvSpPr>
-        <p:spPr>
-          <a:xfrm>
-            <a:off x="4607511" y="3582521"/>
+            <a:off x="4359534" y="3567781"/>
             <a:ext cx="523782" cy="625495"/>
           </a:xfrm>
           <a:prstGeom prst="rightArrow">
@@ -3575,12 +3548,258 @@
           </a:p>
         </p:txBody>
       </p:sp>
-      <p:sp>
-        <p:nvSpPr>
-          <p:cNvPr id="15" name="Arrow: Right 14">
-            <a:extLst>
-              <a:ext uri="{FF2B5EF4-FFF2-40B4-BE49-F238E27FC236}">
-                <a16:creationId xmlns:a16="http://schemas.microsoft.com/office/drawing/2014/main" id="{2C4E8C79-D4DA-BD04-1BE9-5B50799BB2F7}"/>
+      <p:pic>
+        <p:nvPicPr>
+          <p:cNvPr id="6" name="Picture 5">
+            <a:extLst>
+              <a:ext uri="{FF2B5EF4-FFF2-40B4-BE49-F238E27FC236}">
+                <a16:creationId xmlns:a16="http://schemas.microsoft.com/office/drawing/2014/main" id="{31AC4874-2CAA-28BF-2D6C-5D775EF0CE8E}"/>
+              </a:ext>
+            </a:extLst>
+          </p:cNvPr>
+          <p:cNvPicPr>
+            <a:picLocks noChangeAspect="1"/>
+          </p:cNvPicPr>
+          <p:nvPr/>
+        </p:nvPicPr>
+        <p:blipFill>
+          <a:blip r:embed="rId6">
+            <a:extLst>
+              <a:ext uri="{28A0092B-C50C-407E-A947-70E740481C1C}">
+                <a14:useLocalDpi xmlns:a14="http://schemas.microsoft.com/office/drawing/2010/main" val="0"/>
+              </a:ext>
+            </a:extLst>
+          </a:blip>
+          <a:stretch>
+            <a:fillRect/>
+          </a:stretch>
+        </p:blipFill>
+        <p:spPr>
+          <a:xfrm>
+            <a:off x="2334576" y="3427078"/>
+            <a:ext cx="1870932" cy="1406548"/>
+          </a:xfrm>
+          <a:prstGeom prst="rect">
+            <a:avLst/>
+          </a:prstGeom>
+        </p:spPr>
+      </p:pic>
+      <p:pic>
+        <p:nvPicPr>
+          <p:cNvPr id="9" name="Picture 8">
+            <a:extLst>
+              <a:ext uri="{FF2B5EF4-FFF2-40B4-BE49-F238E27FC236}">
+                <a16:creationId xmlns:a16="http://schemas.microsoft.com/office/drawing/2014/main" id="{C62285C1-B356-4B57-5CA3-30F1270AD5B5}"/>
+              </a:ext>
+            </a:extLst>
+          </p:cNvPr>
+          <p:cNvPicPr>
+            <a:picLocks noChangeAspect="1"/>
+          </p:cNvPicPr>
+          <p:nvPr/>
+        </p:nvPicPr>
+        <p:blipFill>
+          <a:blip r:embed="rId7">
+            <a:extLst>
+              <a:ext uri="{28A0092B-C50C-407E-A947-70E740481C1C}">
+                <a14:useLocalDpi xmlns:a14="http://schemas.microsoft.com/office/drawing/2010/main" val="0"/>
+              </a:ext>
+            </a:extLst>
+          </a:blip>
+          <a:stretch>
+            <a:fillRect/>
+          </a:stretch>
+        </p:blipFill>
+        <p:spPr>
+          <a:xfrm>
+            <a:off x="368656" y="4904552"/>
+            <a:ext cx="1868518" cy="1406936"/>
+          </a:xfrm>
+          <a:prstGeom prst="rect">
+            <a:avLst/>
+          </a:prstGeom>
+        </p:spPr>
+      </p:pic>
+      <p:pic>
+        <p:nvPicPr>
+          <p:cNvPr id="12" name="Picture 11">
+            <a:extLst>
+              <a:ext uri="{FF2B5EF4-FFF2-40B4-BE49-F238E27FC236}">
+                <a16:creationId xmlns:a16="http://schemas.microsoft.com/office/drawing/2014/main" id="{6D03543B-0C34-8A00-EF91-2229400A6825}"/>
+              </a:ext>
+            </a:extLst>
+          </p:cNvPr>
+          <p:cNvPicPr>
+            <a:picLocks noChangeAspect="1"/>
+          </p:cNvPicPr>
+          <p:nvPr/>
+        </p:nvPicPr>
+        <p:blipFill>
+          <a:blip r:embed="rId8">
+            <a:extLst>
+              <a:ext uri="{28A0092B-C50C-407E-A947-70E740481C1C}">
+                <a14:useLocalDpi xmlns:a14="http://schemas.microsoft.com/office/drawing/2010/main" val="0"/>
+              </a:ext>
+            </a:extLst>
+          </a:blip>
+          <a:stretch>
+            <a:fillRect/>
+          </a:stretch>
+        </p:blipFill>
+        <p:spPr>
+          <a:xfrm>
+            <a:off x="2330390" y="4907321"/>
+            <a:ext cx="1876890" cy="1406548"/>
+          </a:xfrm>
+          <a:prstGeom prst="rect">
+            <a:avLst/>
+          </a:prstGeom>
+        </p:spPr>
+      </p:pic>
+      <p:cxnSp>
+        <p:nvCxnSpPr>
+          <p:cNvPr id="17" name="Straight Arrow Connector 16">
+            <a:extLst>
+              <a:ext uri="{FF2B5EF4-FFF2-40B4-BE49-F238E27FC236}">
+                <a16:creationId xmlns:a16="http://schemas.microsoft.com/office/drawing/2014/main" id="{ACDA2F19-6C63-28C0-C163-BE050007270B}"/>
+              </a:ext>
+            </a:extLst>
+          </p:cNvPr>
+          <p:cNvCxnSpPr>
+            <a:cxnSpLocks/>
+          </p:cNvCxnSpPr>
+          <p:nvPr/>
+        </p:nvCxnSpPr>
+        <p:spPr>
+          <a:xfrm flipV="1">
+            <a:off x="9962067" y="3515629"/>
+            <a:ext cx="1063690" cy="911656"/>
+          </a:xfrm>
+          <a:prstGeom prst="straightConnector1">
+            <a:avLst/>
+          </a:prstGeom>
+          <a:ln w="41275">
+            <a:solidFill>
+              <a:schemeClr val="accent4">
+                <a:lumMod val="60000"/>
+                <a:lumOff val="40000"/>
+              </a:schemeClr>
+            </a:solidFill>
+            <a:headEnd type="none"/>
+            <a:tailEnd type="triangle" w="sm" len="lg"/>
+          </a:ln>
+        </p:spPr>
+        <p:style>
+          <a:lnRef idx="1">
+            <a:schemeClr val="accent1"/>
+          </a:lnRef>
+          <a:fillRef idx="0">
+            <a:schemeClr val="accent1"/>
+          </a:fillRef>
+          <a:effectRef idx="0">
+            <a:schemeClr val="accent1"/>
+          </a:effectRef>
+          <a:fontRef idx="minor">
+            <a:schemeClr val="tx1"/>
+          </a:fontRef>
+        </p:style>
+      </p:cxnSp>
+      <p:cxnSp>
+        <p:nvCxnSpPr>
+          <p:cNvPr id="19" name="Straight Arrow Connector 18">
+            <a:extLst>
+              <a:ext uri="{FF2B5EF4-FFF2-40B4-BE49-F238E27FC236}">
+                <a16:creationId xmlns:a16="http://schemas.microsoft.com/office/drawing/2014/main" id="{FAB9D7C6-0B9F-B2F4-B966-D6CAAF78F634}"/>
+              </a:ext>
+            </a:extLst>
+          </p:cNvPr>
+          <p:cNvCxnSpPr>
+            <a:cxnSpLocks/>
+          </p:cNvCxnSpPr>
+          <p:nvPr/>
+        </p:nvCxnSpPr>
+        <p:spPr>
+          <a:xfrm flipV="1">
+            <a:off x="9962067" y="3321411"/>
+            <a:ext cx="836645" cy="1118236"/>
+          </a:xfrm>
+          <a:prstGeom prst="straightConnector1">
+            <a:avLst/>
+          </a:prstGeom>
+          <a:ln w="41275">
+            <a:solidFill>
+              <a:srgbClr val="7030A0"/>
+            </a:solidFill>
+            <a:headEnd type="none"/>
+            <a:tailEnd type="triangle" w="sm" len="lg"/>
+          </a:ln>
+        </p:spPr>
+        <p:style>
+          <a:lnRef idx="1">
+            <a:schemeClr val="accent1"/>
+          </a:lnRef>
+          <a:fillRef idx="0">
+            <a:schemeClr val="accent1"/>
+          </a:fillRef>
+          <a:effectRef idx="0">
+            <a:schemeClr val="accent1"/>
+          </a:effectRef>
+          <a:fontRef idx="minor">
+            <a:schemeClr val="tx1"/>
+          </a:fontRef>
+        </p:style>
+      </p:cxnSp>
+      <p:cxnSp>
+        <p:nvCxnSpPr>
+          <p:cNvPr id="20" name="Straight Arrow Connector 19">
+            <a:extLst>
+              <a:ext uri="{FF2B5EF4-FFF2-40B4-BE49-F238E27FC236}">
+                <a16:creationId xmlns:a16="http://schemas.microsoft.com/office/drawing/2014/main" id="{83268548-D579-0EEE-BEDB-2878709D938F}"/>
+              </a:ext>
+            </a:extLst>
+          </p:cNvPr>
+          <p:cNvCxnSpPr>
+            <a:cxnSpLocks/>
+          </p:cNvCxnSpPr>
+          <p:nvPr/>
+        </p:nvCxnSpPr>
+        <p:spPr>
+          <a:xfrm flipV="1">
+            <a:off x="9962067" y="3805180"/>
+            <a:ext cx="1236235" cy="622105"/>
+          </a:xfrm>
+          <a:prstGeom prst="straightConnector1">
+            <a:avLst/>
+          </a:prstGeom>
+          <a:ln w="41275">
+            <a:solidFill>
+              <a:srgbClr val="00B0F0"/>
+            </a:solidFill>
+            <a:headEnd type="none"/>
+            <a:tailEnd type="triangle" w="sm" len="lg"/>
+          </a:ln>
+        </p:spPr>
+        <p:style>
+          <a:lnRef idx="1">
+            <a:schemeClr val="accent1"/>
+          </a:lnRef>
+          <a:fillRef idx="0">
+            <a:schemeClr val="accent1"/>
+          </a:fillRef>
+          <a:effectRef idx="0">
+            <a:schemeClr val="accent1"/>
+          </a:effectRef>
+          <a:fontRef idx="minor">
+            <a:schemeClr val="tx1"/>
+          </a:fontRef>
+        </p:style>
+      </p:cxnSp>
+      <p:sp>
+        <p:nvSpPr>
+          <p:cNvPr id="25" name="Arrow: Right 24">
+            <a:extLst>
+              <a:ext uri="{FF2B5EF4-FFF2-40B4-BE49-F238E27FC236}">
+                <a16:creationId xmlns:a16="http://schemas.microsoft.com/office/drawing/2014/main" id="{342F576F-96B8-AD1C-AF3D-3078F2721CF4}"/>
               </a:ext>
             </a:extLst>
           </p:cNvPr>
@@ -3589,7 +3808,7 @@
         </p:nvSpPr>
         <p:spPr>
           <a:xfrm>
-            <a:off x="8304433" y="3528781"/>
+            <a:off x="9089204" y="3520161"/>
             <a:ext cx="523782" cy="625495"/>
           </a:xfrm>
           <a:prstGeom prst="rightArrow">
@@ -3621,6 +3840,53 @@
           </a:p>
         </p:txBody>
       </p:sp>
+      <p:pic>
+        <p:nvPicPr>
+          <p:cNvPr id="1034" name="Picture 10" descr="How Do Neural Networks Learn?">
+            <a:extLst>
+              <a:ext uri="{FF2B5EF4-FFF2-40B4-BE49-F238E27FC236}">
+                <a16:creationId xmlns:a16="http://schemas.microsoft.com/office/drawing/2014/main" id="{02FE1E08-F97B-37E4-05DA-B4E31A1B9C10}"/>
+              </a:ext>
+            </a:extLst>
+          </p:cNvPr>
+          <p:cNvPicPr>
+            <a:picLocks noChangeAspect="1" noChangeArrowheads="1"/>
+          </p:cNvPicPr>
+          <p:nvPr/>
+        </p:nvPicPr>
+        <p:blipFill>
+          <a:blip r:embed="rId9">
+            <a:extLst>
+              <a:ext uri="{28A0092B-C50C-407E-A947-70E740481C1C}">
+                <a14:useLocalDpi xmlns:a14="http://schemas.microsoft.com/office/drawing/2010/main" val="0"/>
+              </a:ext>
+            </a:extLst>
+          </a:blip>
+          <a:srcRect/>
+          <a:stretch>
+            <a:fillRect/>
+          </a:stretch>
+        </p:blipFill>
+        <p:spPr bwMode="auto">
+          <a:xfrm>
+            <a:off x="5238844" y="2841789"/>
+            <a:ext cx="3450770" cy="1991837"/>
+          </a:xfrm>
+          <a:prstGeom prst="rect">
+            <a:avLst/>
+          </a:prstGeom>
+          <a:noFill/>
+          <a:extLst>
+            <a:ext uri="{909E8E84-426E-40DD-AFC4-6F175D3DCCD1}">
+              <a14:hiddenFill xmlns:a14="http://schemas.microsoft.com/office/drawing/2010/main">
+                <a:solidFill>
+                  <a:srgbClr val="FFFFFF"/>
+                </a:solidFill>
+              </a14:hiddenFill>
+            </a:ext>
+          </a:extLst>
+        </p:spPr>
+      </p:pic>
     </p:spTree>
     <p:extLst>
       <p:ext uri="{BB962C8B-B14F-4D97-AF65-F5344CB8AC3E}">
@@ -3635,6 +3901,173 @@
 </file>
 
 <file path=ppt/slides/slide2.xml><?xml version="1.0" encoding="utf-8"?>
+<p:sld xmlns:a="http://schemas.openxmlformats.org/drawingml/2006/main" xmlns:r="http://schemas.openxmlformats.org/officeDocument/2006/relationships" xmlns:p="http://schemas.openxmlformats.org/presentationml/2006/main">
+  <p:cSld>
+    <p:spTree>
+      <p:nvGrpSpPr>
+        <p:cNvPr id="1" name=""/>
+        <p:cNvGrpSpPr/>
+        <p:nvPr/>
+      </p:nvGrpSpPr>
+      <p:grpSpPr>
+        <a:xfrm>
+          <a:off x="0" y="0"/>
+          <a:ext cx="0" cy="0"/>
+          <a:chOff x="0" y="0"/>
+          <a:chExt cx="0" cy="0"/>
+        </a:xfrm>
+      </p:grpSpPr>
+      <p:sp>
+        <p:nvSpPr>
+          <p:cNvPr id="2" name="Title 1">
+            <a:extLst>
+              <a:ext uri="{FF2B5EF4-FFF2-40B4-BE49-F238E27FC236}">
+                <a16:creationId xmlns:a16="http://schemas.microsoft.com/office/drawing/2014/main" id="{F1F2B90D-30D3-3EB9-129D-2342EA7420F5}"/>
+              </a:ext>
+            </a:extLst>
+          </p:cNvPr>
+          <p:cNvSpPr>
+            <a:spLocks noGrp="1"/>
+          </p:cNvSpPr>
+          <p:nvPr>
+            <p:ph type="title"/>
+          </p:nvPr>
+        </p:nvSpPr>
+        <p:spPr/>
+        <p:txBody>
+          <a:bodyPr/>
+          <a:lstStyle/>
+          <a:p>
+            <a:pPr algn="ctr"/>
+            <a:r>
+              <a:rPr lang="en-US" dirty="0"/>
+              <a:t>Resnet 18</a:t>
+            </a:r>
+          </a:p>
+        </p:txBody>
+      </p:sp>
+      <p:pic>
+        <p:nvPicPr>
+          <p:cNvPr id="1030" name="Picture 6" descr="Visualization of the modified ResNet-18 model used for predicting ...">
+            <a:extLst>
+              <a:ext uri="{FF2B5EF4-FFF2-40B4-BE49-F238E27FC236}">
+                <a16:creationId xmlns:a16="http://schemas.microsoft.com/office/drawing/2014/main" id="{400E0E55-113C-31CD-4027-452FC512EB2B}"/>
+              </a:ext>
+            </a:extLst>
+          </p:cNvPr>
+          <p:cNvPicPr>
+            <a:picLocks noGrp="1" noChangeAspect="1" noChangeArrowheads="1"/>
+          </p:cNvPicPr>
+          <p:nvPr>
+            <p:ph idx="1"/>
+          </p:nvPr>
+        </p:nvPicPr>
+        <p:blipFill>
+          <a:blip r:embed="rId2">
+            <a:extLst>
+              <a:ext uri="{28A0092B-C50C-407E-A947-70E740481C1C}">
+                <a14:useLocalDpi xmlns:a14="http://schemas.microsoft.com/office/drawing/2010/main" val="0"/>
+              </a:ext>
+            </a:extLst>
+          </a:blip>
+          <a:srcRect/>
+          <a:stretch>
+            <a:fillRect/>
+          </a:stretch>
+        </p:blipFill>
+        <p:spPr bwMode="auto">
+          <a:xfrm>
+            <a:off x="2682650" y="2171975"/>
+            <a:ext cx="6312060" cy="2910973"/>
+          </a:xfrm>
+          <a:prstGeom prst="rect">
+            <a:avLst/>
+          </a:prstGeom>
+          <a:noFill/>
+          <a:extLst>
+            <a:ext uri="{909E8E84-426E-40DD-AFC4-6F175D3DCCD1}">
+              <a14:hiddenFill xmlns:a14="http://schemas.microsoft.com/office/drawing/2010/main">
+                <a:solidFill>
+                  <a:srgbClr val="FFFFFF"/>
+                </a:solidFill>
+              </a14:hiddenFill>
+            </a:ext>
+          </a:extLst>
+        </p:spPr>
+      </p:pic>
+      <p:sp>
+        <p:nvSpPr>
+          <p:cNvPr id="26" name="TextBox 25">
+            <a:extLst>
+              <a:ext uri="{FF2B5EF4-FFF2-40B4-BE49-F238E27FC236}">
+                <a16:creationId xmlns:a16="http://schemas.microsoft.com/office/drawing/2014/main" id="{0FF3D8D9-6168-12C6-8E0D-E98BA0121FD8}"/>
+              </a:ext>
+            </a:extLst>
+          </p:cNvPr>
+          <p:cNvSpPr txBox="1"/>
+          <p:nvPr/>
+        </p:nvSpPr>
+        <p:spPr>
+          <a:xfrm>
+            <a:off x="6096000" y="5541368"/>
+            <a:ext cx="1463029" cy="646331"/>
+          </a:xfrm>
+          <a:prstGeom prst="rect">
+            <a:avLst/>
+          </a:prstGeom>
+          <a:noFill/>
+        </p:spPr>
+        <p:txBody>
+          <a:bodyPr wrap="none" rtlCol="0">
+            <a:spAutoFit/>
+          </a:bodyPr>
+          <a:lstStyle/>
+          <a:p>
+            <a:pPr marL="285750" indent="-285750">
+              <a:buFont typeface="Arial" panose="020B0604020202020204" pitchFamily="34" charset="0"/>
+              <a:buChar char="•"/>
+            </a:pPr>
+            <a:r>
+              <a:rPr lang="en-US" sz="1200" i="1" dirty="0"/>
+              <a:t>Convolutional</a:t>
+            </a:r>
+          </a:p>
+          <a:p>
+            <a:pPr marL="285750" indent="-285750">
+              <a:buFont typeface="Arial" panose="020B0604020202020204" pitchFamily="34" charset="0"/>
+              <a:buChar char="•"/>
+            </a:pPr>
+            <a:r>
+              <a:rPr lang="en-US" sz="1200" i="1" dirty="0"/>
+              <a:t>Residual</a:t>
+            </a:r>
+          </a:p>
+          <a:p>
+            <a:pPr marL="285750" indent="-285750">
+              <a:buFont typeface="Arial" panose="020B0604020202020204" pitchFamily="34" charset="0"/>
+              <a:buChar char="•"/>
+            </a:pPr>
+            <a:r>
+              <a:rPr lang="en-US" sz="1200" i="1" dirty="0"/>
+              <a:t>Neural Network</a:t>
+            </a:r>
+          </a:p>
+        </p:txBody>
+      </p:sp>
+    </p:spTree>
+    <p:extLst>
+      <p:ext uri="{BB962C8B-B14F-4D97-AF65-F5344CB8AC3E}">
+        <p14:creationId xmlns:p14="http://schemas.microsoft.com/office/powerpoint/2010/main" val="764145166"/>
+      </p:ext>
+    </p:extLst>
+  </p:cSld>
+  <p:clrMapOvr>
+    <a:masterClrMapping/>
+  </p:clrMapOvr>
+</p:sld>
+</file>
+
+<file path=ppt/slides/slide3.xml><?xml version="1.0" encoding="utf-8"?>
 <p:sld xmlns:a="http://schemas.openxmlformats.org/drawingml/2006/main" xmlns:r="http://schemas.openxmlformats.org/officeDocument/2006/relationships" xmlns:p="http://schemas.openxmlformats.org/presentationml/2006/main">
   <p:cSld>
     <p:spTree>
@@ -4136,7 +4569,7 @@
 </p:sld>
 </file>
 
-<file path=ppt/slides/slide3.xml><?xml version="1.0" encoding="utf-8"?>
+<file path=ppt/slides/slide4.xml><?xml version="1.0" encoding="utf-8"?>
 <p:sld xmlns:a="http://schemas.openxmlformats.org/drawingml/2006/main" xmlns:r="http://schemas.openxmlformats.org/officeDocument/2006/relationships" xmlns:p="http://schemas.openxmlformats.org/presentationml/2006/main">
   <p:cSld>
     <p:spTree>
@@ -4923,7 +5356,7 @@
 </p:sld>
 </file>
 
-<file path=ppt/slides/slide4.xml><?xml version="1.0" encoding="utf-8"?>
+<file path=ppt/slides/slide5.xml><?xml version="1.0" encoding="utf-8"?>
 <p:sld xmlns:a="http://schemas.openxmlformats.org/drawingml/2006/main" xmlns:r="http://schemas.openxmlformats.org/officeDocument/2006/relationships" xmlns:p="http://schemas.openxmlformats.org/presentationml/2006/main">
   <p:cSld>
     <p:spTree>
@@ -5010,7 +5443,537 @@
 </p:sld>
 </file>
 
-<file path=ppt/slides/slide5.xml><?xml version="1.0" encoding="utf-8"?>
+<file path=ppt/slides/slide6.xml><?xml version="1.0" encoding="utf-8"?>
+<p:sld xmlns:a="http://schemas.openxmlformats.org/drawingml/2006/main" xmlns:r="http://schemas.openxmlformats.org/officeDocument/2006/relationships" xmlns:p="http://schemas.openxmlformats.org/presentationml/2006/main">
+  <p:cSld>
+    <p:spTree>
+      <p:nvGrpSpPr>
+        <p:cNvPr id="1" name=""/>
+        <p:cNvGrpSpPr/>
+        <p:nvPr/>
+      </p:nvGrpSpPr>
+      <p:grpSpPr>
+        <a:xfrm>
+          <a:off x="0" y="0"/>
+          <a:ext cx="0" cy="0"/>
+          <a:chOff x="0" y="0"/>
+          <a:chExt cx="0" cy="0"/>
+        </a:xfrm>
+      </p:grpSpPr>
+      <p:sp>
+        <p:nvSpPr>
+          <p:cNvPr id="2" name="Title 1">
+            <a:extLst>
+              <a:ext uri="{FF2B5EF4-FFF2-40B4-BE49-F238E27FC236}">
+                <a16:creationId xmlns:a16="http://schemas.microsoft.com/office/drawing/2014/main" id="{649E57CE-1131-0332-FE53-95680EE2F8CE}"/>
+              </a:ext>
+            </a:extLst>
+          </p:cNvPr>
+          <p:cNvSpPr>
+            <a:spLocks noGrp="1"/>
+          </p:cNvSpPr>
+          <p:nvPr>
+            <p:ph type="title"/>
+          </p:nvPr>
+        </p:nvSpPr>
+        <p:spPr/>
+        <p:txBody>
+          <a:bodyPr/>
+          <a:lstStyle/>
+          <a:p>
+            <a:r>
+              <a:rPr lang="en-US" dirty="0"/>
+              <a:t>Which 3 are most like the Query….</a:t>
+            </a:r>
+          </a:p>
+        </p:txBody>
+      </p:sp>
+      <p:pic>
+        <p:nvPicPr>
+          <p:cNvPr id="4" name="Picture 3">
+            <a:extLst>
+              <a:ext uri="{FF2B5EF4-FFF2-40B4-BE49-F238E27FC236}">
+                <a16:creationId xmlns:a16="http://schemas.microsoft.com/office/drawing/2014/main" id="{B753FC35-648F-D26E-1FB1-478490C71C2B}"/>
+              </a:ext>
+            </a:extLst>
+          </p:cNvPr>
+          <p:cNvPicPr>
+            <a:picLocks noChangeAspect="1"/>
+          </p:cNvPicPr>
+          <p:nvPr/>
+        </p:nvPicPr>
+        <p:blipFill>
+          <a:blip r:embed="rId2">
+            <a:extLst>
+              <a:ext uri="{28A0092B-C50C-407E-A947-70E740481C1C}">
+                <a14:useLocalDpi xmlns:a14="http://schemas.microsoft.com/office/drawing/2010/main" val="0"/>
+              </a:ext>
+            </a:extLst>
+          </a:blip>
+          <a:stretch>
+            <a:fillRect/>
+          </a:stretch>
+        </p:blipFill>
+        <p:spPr>
+          <a:xfrm>
+            <a:off x="1789878" y="3255167"/>
+            <a:ext cx="1868518" cy="1393766"/>
+          </a:xfrm>
+          <a:prstGeom prst="rect">
+            <a:avLst/>
+          </a:prstGeom>
+        </p:spPr>
+      </p:pic>
+      <p:pic>
+        <p:nvPicPr>
+          <p:cNvPr id="5" name="Picture 4">
+            <a:extLst>
+              <a:ext uri="{FF2B5EF4-FFF2-40B4-BE49-F238E27FC236}">
+                <a16:creationId xmlns:a16="http://schemas.microsoft.com/office/drawing/2014/main" id="{7270876E-8CEC-2AA2-93C7-2AEB3CF5E86D}"/>
+              </a:ext>
+            </a:extLst>
+          </p:cNvPr>
+          <p:cNvPicPr>
+            <a:picLocks noChangeAspect="1"/>
+          </p:cNvPicPr>
+          <p:nvPr/>
+        </p:nvPicPr>
+        <p:blipFill>
+          <a:blip r:embed="rId3">
+            <a:extLst>
+              <a:ext uri="{28A0092B-C50C-407E-A947-70E740481C1C}">
+                <a14:useLocalDpi xmlns:a14="http://schemas.microsoft.com/office/drawing/2010/main" val="0"/>
+              </a:ext>
+            </a:extLst>
+          </a:blip>
+          <a:stretch>
+            <a:fillRect/>
+          </a:stretch>
+        </p:blipFill>
+        <p:spPr>
+          <a:xfrm>
+            <a:off x="6012025" y="2551698"/>
+            <a:ext cx="1868519" cy="1406937"/>
+          </a:xfrm>
+          <a:prstGeom prst="rect">
+            <a:avLst/>
+          </a:prstGeom>
+          <a:ln w="38100">
+            <a:solidFill>
+              <a:srgbClr val="00B050"/>
+            </a:solidFill>
+          </a:ln>
+        </p:spPr>
+      </p:pic>
+      <p:pic>
+        <p:nvPicPr>
+          <p:cNvPr id="6" name="Picture 5">
+            <a:extLst>
+              <a:ext uri="{FF2B5EF4-FFF2-40B4-BE49-F238E27FC236}">
+                <a16:creationId xmlns:a16="http://schemas.microsoft.com/office/drawing/2014/main" id="{45EBE805-0A3F-C361-7B70-CADBA776D8D1}"/>
+              </a:ext>
+            </a:extLst>
+          </p:cNvPr>
+          <p:cNvPicPr>
+            <a:picLocks noChangeAspect="1"/>
+          </p:cNvPicPr>
+          <p:nvPr/>
+        </p:nvPicPr>
+        <p:blipFill>
+          <a:blip r:embed="rId4">
+            <a:extLst>
+              <a:ext uri="{28A0092B-C50C-407E-A947-70E740481C1C}">
+                <a14:useLocalDpi xmlns:a14="http://schemas.microsoft.com/office/drawing/2010/main" val="0"/>
+              </a:ext>
+            </a:extLst>
+          </a:blip>
+          <a:stretch>
+            <a:fillRect/>
+          </a:stretch>
+        </p:blipFill>
+        <p:spPr>
+          <a:xfrm>
+            <a:off x="10035733" y="2552088"/>
+            <a:ext cx="1857536" cy="1406547"/>
+          </a:xfrm>
+          <a:prstGeom prst="rect">
+            <a:avLst/>
+          </a:prstGeom>
+          <a:ln w="38100">
+            <a:solidFill>
+              <a:srgbClr val="00B050"/>
+            </a:solidFill>
+          </a:ln>
+        </p:spPr>
+      </p:pic>
+      <p:pic>
+        <p:nvPicPr>
+          <p:cNvPr id="7" name="Picture 6">
+            <a:extLst>
+              <a:ext uri="{FF2B5EF4-FFF2-40B4-BE49-F238E27FC236}">
+                <a16:creationId xmlns:a16="http://schemas.microsoft.com/office/drawing/2014/main" id="{F52018B0-FAF5-634C-DF1F-5E31B420F3A7}"/>
+              </a:ext>
+            </a:extLst>
+          </p:cNvPr>
+          <p:cNvPicPr>
+            <a:picLocks noChangeAspect="1"/>
+          </p:cNvPicPr>
+          <p:nvPr/>
+        </p:nvPicPr>
+        <p:blipFill>
+          <a:blip r:embed="rId5">
+            <a:extLst>
+              <a:ext uri="{28A0092B-C50C-407E-A947-70E740481C1C}">
+                <a14:useLocalDpi xmlns:a14="http://schemas.microsoft.com/office/drawing/2010/main" val="0"/>
+              </a:ext>
+            </a:extLst>
+          </a:blip>
+          <a:stretch>
+            <a:fillRect/>
+          </a:stretch>
+        </p:blipFill>
+        <p:spPr>
+          <a:xfrm>
+            <a:off x="8022672" y="2545502"/>
+            <a:ext cx="1870932" cy="1406548"/>
+          </a:xfrm>
+          <a:prstGeom prst="rect">
+            <a:avLst/>
+          </a:prstGeom>
+          <a:ln w="34925">
+            <a:solidFill>
+              <a:srgbClr val="00B050"/>
+            </a:solidFill>
+          </a:ln>
+        </p:spPr>
+      </p:pic>
+      <p:pic>
+        <p:nvPicPr>
+          <p:cNvPr id="8" name="Picture 7">
+            <a:extLst>
+              <a:ext uri="{FF2B5EF4-FFF2-40B4-BE49-F238E27FC236}">
+                <a16:creationId xmlns:a16="http://schemas.microsoft.com/office/drawing/2014/main" id="{E3597395-D27C-3BA6-FDE4-CEBDBF78524E}"/>
+              </a:ext>
+            </a:extLst>
+          </p:cNvPr>
+          <p:cNvPicPr>
+            <a:picLocks noChangeAspect="1"/>
+          </p:cNvPicPr>
+          <p:nvPr/>
+        </p:nvPicPr>
+        <p:blipFill>
+          <a:blip r:embed="rId6">
+            <a:extLst>
+              <a:ext uri="{28A0092B-C50C-407E-A947-70E740481C1C}">
+                <a14:useLocalDpi xmlns:a14="http://schemas.microsoft.com/office/drawing/2010/main" val="0"/>
+              </a:ext>
+            </a:extLst>
+          </a:blip>
+          <a:stretch>
+            <a:fillRect/>
+          </a:stretch>
+        </p:blipFill>
+        <p:spPr>
+          <a:xfrm>
+            <a:off x="7131608" y="4116761"/>
+            <a:ext cx="1868518" cy="1406936"/>
+          </a:xfrm>
+          <a:prstGeom prst="rect">
+            <a:avLst/>
+          </a:prstGeom>
+        </p:spPr>
+      </p:pic>
+      <p:pic>
+        <p:nvPicPr>
+          <p:cNvPr id="9" name="Picture 8">
+            <a:extLst>
+              <a:ext uri="{FF2B5EF4-FFF2-40B4-BE49-F238E27FC236}">
+                <a16:creationId xmlns:a16="http://schemas.microsoft.com/office/drawing/2014/main" id="{472FAB5C-EBDB-9BDC-B630-37F7C172AB70}"/>
+              </a:ext>
+            </a:extLst>
+          </p:cNvPr>
+          <p:cNvPicPr>
+            <a:picLocks noChangeAspect="1"/>
+          </p:cNvPicPr>
+          <p:nvPr/>
+        </p:nvPicPr>
+        <p:blipFill>
+          <a:blip r:embed="rId7">
+            <a:extLst>
+              <a:ext uri="{28A0092B-C50C-407E-A947-70E740481C1C}">
+                <a14:useLocalDpi xmlns:a14="http://schemas.microsoft.com/office/drawing/2010/main" val="0"/>
+              </a:ext>
+            </a:extLst>
+          </a:blip>
+          <a:stretch>
+            <a:fillRect/>
+          </a:stretch>
+        </p:blipFill>
+        <p:spPr>
+          <a:xfrm>
+            <a:off x="9255909" y="4116761"/>
+            <a:ext cx="1876890" cy="1406548"/>
+          </a:xfrm>
+          <a:prstGeom prst="rect">
+            <a:avLst/>
+          </a:prstGeom>
+          <a:ln w="34925">
+            <a:noFill/>
+          </a:ln>
+        </p:spPr>
+      </p:pic>
+      <p:sp>
+        <p:nvSpPr>
+          <p:cNvPr id="11" name="TextBox 10">
+            <a:extLst>
+              <a:ext uri="{FF2B5EF4-FFF2-40B4-BE49-F238E27FC236}">
+                <a16:creationId xmlns:a16="http://schemas.microsoft.com/office/drawing/2014/main" id="{6FBC8055-583C-DD00-9DB4-DD9AA2346858}"/>
+              </a:ext>
+            </a:extLst>
+          </p:cNvPr>
+          <p:cNvSpPr txBox="1"/>
+          <p:nvPr/>
+        </p:nvSpPr>
+        <p:spPr>
+          <a:xfrm>
+            <a:off x="901666" y="5824125"/>
+            <a:ext cx="10231133" cy="553998"/>
+          </a:xfrm>
+          <a:prstGeom prst="rect">
+            <a:avLst/>
+          </a:prstGeom>
+          <a:noFill/>
+        </p:spPr>
+        <p:txBody>
+          <a:bodyPr wrap="square">
+            <a:spAutoFit/>
+          </a:bodyPr>
+          <a:lstStyle/>
+          <a:p>
+            <a:r>
+              <a:rPr lang="en-US" sz="1000" b="0" i="0" dirty="0">
+                <a:solidFill>
+                  <a:schemeClr val="accent1">
+                    <a:lumMod val="60000"/>
+                    <a:lumOff val="40000"/>
+                  </a:schemeClr>
+                </a:solidFill>
+                <a:effectLst/>
+                <a:latin typeface="Consolas" panose="020B0609020204030204" pitchFamily="49" charset="0"/>
+              </a:rPr>
+              <a:t>id: 2, distance: 0.000, entity: {'</a:t>
+            </a:r>
+            <a:r>
+              <a:rPr lang="en-US" sz="1000" b="0" i="0" dirty="0" err="1">
+                <a:solidFill>
+                  <a:schemeClr val="accent1">
+                    <a:lumMod val="60000"/>
+                    <a:lumOff val="40000"/>
+                  </a:schemeClr>
+                </a:solidFill>
+                <a:effectLst/>
+                <a:latin typeface="Consolas" panose="020B0609020204030204" pitchFamily="49" charset="0"/>
+              </a:rPr>
+              <a:t>Image_Name</a:t>
+            </a:r>
+            <a:r>
+              <a:rPr lang="en-US" sz="1000" b="0" i="0" dirty="0">
+                <a:solidFill>
+                  <a:schemeClr val="accent1">
+                    <a:lumMod val="60000"/>
+                    <a:lumOff val="40000"/>
+                  </a:schemeClr>
+                </a:solidFill>
+                <a:effectLst/>
+                <a:latin typeface="Consolas" panose="020B0609020204030204" pitchFamily="49" charset="0"/>
+              </a:rPr>
+              <a:t>': 'Heterogeneity-of-TDP-43-inclusion-pathology-B.jpeg', '</a:t>
+            </a:r>
+            <a:r>
+              <a:rPr lang="en-US" sz="1000" b="0" i="0" dirty="0" err="1">
+                <a:solidFill>
+                  <a:schemeClr val="accent1">
+                    <a:lumMod val="60000"/>
+                    <a:lumOff val="40000"/>
+                  </a:schemeClr>
+                </a:solidFill>
+                <a:effectLst/>
+                <a:latin typeface="Consolas" panose="020B0609020204030204" pitchFamily="49" charset="0"/>
+              </a:rPr>
+              <a:t>Image_Date</a:t>
+            </a:r>
+            <a:r>
+              <a:rPr lang="en-US" sz="1000" b="0" i="0" dirty="0">
+                <a:solidFill>
+                  <a:schemeClr val="accent1">
+                    <a:lumMod val="60000"/>
+                    <a:lumOff val="40000"/>
+                  </a:schemeClr>
+                </a:solidFill>
+                <a:effectLst/>
+                <a:latin typeface="Consolas" panose="020B0609020204030204" pitchFamily="49" charset="0"/>
+              </a:rPr>
+              <a:t>': '20240714’} </a:t>
+            </a:r>
+          </a:p>
+          <a:p>
+            <a:r>
+              <a:rPr lang="en-US" sz="1000" b="0" i="0" dirty="0">
+                <a:solidFill>
+                  <a:schemeClr val="accent1">
+                    <a:lumMod val="60000"/>
+                    <a:lumOff val="40000"/>
+                  </a:schemeClr>
+                </a:solidFill>
+                <a:effectLst/>
+                <a:latin typeface="Consolas" panose="020B0609020204030204" pitchFamily="49" charset="0"/>
+              </a:rPr>
+              <a:t>id: 4, distance: 204.0, entity: {'</a:t>
+            </a:r>
+            <a:r>
+              <a:rPr lang="en-US" sz="1000" b="0" i="0" dirty="0" err="1">
+                <a:solidFill>
+                  <a:schemeClr val="accent1">
+                    <a:lumMod val="60000"/>
+                    <a:lumOff val="40000"/>
+                  </a:schemeClr>
+                </a:solidFill>
+                <a:effectLst/>
+                <a:latin typeface="Consolas" panose="020B0609020204030204" pitchFamily="49" charset="0"/>
+              </a:rPr>
+              <a:t>Image_Name</a:t>
+            </a:r>
+            <a:r>
+              <a:rPr lang="en-US" sz="1000" b="0" i="0" dirty="0">
+                <a:solidFill>
+                  <a:schemeClr val="accent1">
+                    <a:lumMod val="60000"/>
+                    <a:lumOff val="40000"/>
+                  </a:schemeClr>
+                </a:solidFill>
+                <a:effectLst/>
+                <a:latin typeface="Consolas" panose="020B0609020204030204" pitchFamily="49" charset="0"/>
+              </a:rPr>
+              <a:t>': 'Heterogeneity-of-TDP-43-inclusion-pathology-D.jpeg', '</a:t>
+            </a:r>
+            <a:r>
+              <a:rPr lang="en-US" sz="1000" b="0" i="0" dirty="0" err="1">
+                <a:solidFill>
+                  <a:schemeClr val="accent1">
+                    <a:lumMod val="60000"/>
+                    <a:lumOff val="40000"/>
+                  </a:schemeClr>
+                </a:solidFill>
+                <a:effectLst/>
+                <a:latin typeface="Consolas" panose="020B0609020204030204" pitchFamily="49" charset="0"/>
+              </a:rPr>
+              <a:t>Image_Date</a:t>
+            </a:r>
+            <a:r>
+              <a:rPr lang="en-US" sz="1000" b="0" i="0" dirty="0">
+                <a:solidFill>
+                  <a:schemeClr val="accent1">
+                    <a:lumMod val="60000"/>
+                    <a:lumOff val="40000"/>
+                  </a:schemeClr>
+                </a:solidFill>
+                <a:effectLst/>
+                <a:latin typeface="Consolas" panose="020B0609020204030204" pitchFamily="49" charset="0"/>
+              </a:rPr>
+              <a:t>': '20240714’}</a:t>
+            </a:r>
+          </a:p>
+          <a:p>
+            <a:r>
+              <a:rPr lang="en-US" sz="1000" b="0" i="0" dirty="0">
+                <a:solidFill>
+                  <a:schemeClr val="accent1">
+                    <a:lumMod val="60000"/>
+                    <a:lumOff val="40000"/>
+                  </a:schemeClr>
+                </a:solidFill>
+                <a:effectLst/>
+                <a:latin typeface="Consolas" panose="020B0609020204030204" pitchFamily="49" charset="0"/>
+              </a:rPr>
+              <a:t>id: 3, distance: 242.4, entity: {'</a:t>
+            </a:r>
+            <a:r>
+              <a:rPr lang="en-US" sz="1000" b="0" i="0" dirty="0" err="1">
+                <a:solidFill>
+                  <a:schemeClr val="accent1">
+                    <a:lumMod val="60000"/>
+                    <a:lumOff val="40000"/>
+                  </a:schemeClr>
+                </a:solidFill>
+                <a:effectLst/>
+                <a:latin typeface="Consolas" panose="020B0609020204030204" pitchFamily="49" charset="0"/>
+              </a:rPr>
+              <a:t>Image_Name</a:t>
+            </a:r>
+            <a:r>
+              <a:rPr lang="en-US" sz="1000" b="0" i="0" dirty="0">
+                <a:solidFill>
+                  <a:schemeClr val="accent1">
+                    <a:lumMod val="60000"/>
+                    <a:lumOff val="40000"/>
+                  </a:schemeClr>
+                </a:solidFill>
+                <a:effectLst/>
+                <a:latin typeface="Consolas" panose="020B0609020204030204" pitchFamily="49" charset="0"/>
+              </a:rPr>
+              <a:t>': 'Heterogeneity-of-TDP-43-inclusion-pathology-C.jpeg', '</a:t>
+            </a:r>
+            <a:r>
+              <a:rPr lang="en-US" sz="1000" b="0" i="0" dirty="0" err="1">
+                <a:solidFill>
+                  <a:schemeClr val="accent1">
+                    <a:lumMod val="60000"/>
+                    <a:lumOff val="40000"/>
+                  </a:schemeClr>
+                </a:solidFill>
+                <a:effectLst/>
+                <a:latin typeface="Consolas" panose="020B0609020204030204" pitchFamily="49" charset="0"/>
+              </a:rPr>
+              <a:t>Image_Date</a:t>
+            </a:r>
+            <a:r>
+              <a:rPr lang="en-US" sz="1000" b="0" i="0" dirty="0">
+                <a:solidFill>
+                  <a:schemeClr val="accent1">
+                    <a:lumMod val="60000"/>
+                    <a:lumOff val="40000"/>
+                  </a:schemeClr>
+                </a:solidFill>
+                <a:effectLst/>
+                <a:latin typeface="Consolas" panose="020B0609020204030204" pitchFamily="49" charset="0"/>
+              </a:rPr>
+              <a:t>': '20240714'}</a:t>
+            </a:r>
+            <a:endParaRPr lang="en-US" sz="1000" dirty="0">
+              <a:solidFill>
+                <a:schemeClr val="accent1">
+                  <a:lumMod val="60000"/>
+                  <a:lumOff val="40000"/>
+                </a:schemeClr>
+              </a:solidFill>
+            </a:endParaRPr>
+          </a:p>
+        </p:txBody>
+      </p:sp>
+    </p:spTree>
+    <p:extLst>
+      <p:ext uri="{BB962C8B-B14F-4D97-AF65-F5344CB8AC3E}">
+        <p14:creationId xmlns:p14="http://schemas.microsoft.com/office/powerpoint/2010/main" val="712983599"/>
+      </p:ext>
+    </p:extLst>
+  </p:cSld>
+  <p:clrMapOvr>
+    <a:masterClrMapping/>
+  </p:clrMapOvr>
+</p:sld>
+</file>
+
+<file path=ppt/slides/slide7.xml><?xml version="1.0" encoding="utf-8"?>
 <p:sld xmlns:a="http://schemas.openxmlformats.org/drawingml/2006/main" xmlns:r="http://schemas.openxmlformats.org/officeDocument/2006/relationships" xmlns:p="http://schemas.openxmlformats.org/presentationml/2006/main">
   <p:cSld>
     <p:spTree>
